--- a/docs/etl/FedProspect-ETL-Architecture.pptx
+++ b/docs/etl/FedProspect-ETL-Architecture.pptx
@@ -5450,7 +5450,7 @@
         </p:nvGraphicFramePr>
         <p:xfrm>
           <a:off x="274320" y="3108960"/>
-          <a:ext cx="10972800" cy="1371600"/>
+          <a:ext cx="10972800" cy="2011680"/>
         </p:xfrm>
         <a:graphic>
           <a:graphicData uri="http://schemas.openxmlformats.org/drawingml/2006/table">
@@ -5464,7 +5464,7 @@
                 <a:gridCol w="2286000"/>
                 <a:gridCol w="4572000"/>
               </a:tblGrid>
-              <a:tr h="457200">
+              <a:tr h="402336">
                 <a:tc>
                   <a:txBody>
                     <a:bodyPr lIns="45720" rIns="45720" tIns="27432" bIns="27432"/>
@@ -5558,7 +5558,7 @@
                   </a:tcPr>
                 </a:tc>
               </a:tr>
-              <a:tr h="457200">
+              <a:tr h="402336">
                 <a:tc>
                   <a:txBody>
                     <a:bodyPr lIns="45720" rIns="45720" tIns="27432" bIns="27432"/>
@@ -5636,7 +5636,7 @@
                   <a:tcPr/>
                 </a:tc>
               </a:tr>
-              <a:tr h="457200">
+              <a:tr h="402336">
                 <a:tc>
                   <a:txBody>
                     <a:bodyPr lIns="45720" rIns="45720" tIns="27432" bIns="27432"/>
@@ -5730,6 +5730,178 @@
                   </a:tcPr>
                 </a:tc>
               </a:tr>
+              <a:tr h="402336">
+                <a:tc>
+                  <a:txBody>
+                    <a:bodyPr lIns="45720" rIns="45720" tIns="27432" bIns="27432"/>
+                    <a:lstStyle/>
+                    <a:p>
+                      <a:pPr>
+                        <a:defRPr sz="1200">
+                          <a:solidFill>
+                            <a:srgbClr val="000000"/>
+                          </a:solidFill>
+                        </a:defRPr>
+                      </a:pPr>
+                      <a:r>
+                        <a:t>REFRESH_FEDHIER_ORG</a:t>
+                      </a:r>
+                    </a:p>
+                  </a:txBody>
+                  <a:tcPr/>
+                </a:tc>
+                <a:tc>
+                  <a:txBody>
+                    <a:bodyPr lIns="45720" rIns="45720" tIns="27432" bIns="27432"/>
+                    <a:lstStyle/>
+                    <a:p>
+                      <a:pPr>
+                        <a:defRPr sz="1200">
+                          <a:solidFill>
+                            <a:srgbClr val="000000"/>
+                          </a:solidFill>
+                        </a:defRPr>
+                      </a:pPr>
+                      <a:r>
+                        <a:t>SAM.gov Fed Hierarchy</a:t>
+                      </a:r>
+                    </a:p>
+                  </a:txBody>
+                  <a:tcPr/>
+                </a:tc>
+                <a:tc>
+                  <a:txBody>
+                    <a:bodyPr lIns="45720" rIns="45720" tIns="27432" bIns="27432"/>
+                    <a:lstStyle/>
+                    <a:p>
+                      <a:pPr>
+                        <a:defRPr sz="1200">
+                          <a:solidFill>
+                            <a:srgbClr val="000000"/>
+                          </a:solidFill>
+                        </a:defRPr>
+                      </a:pPr>
+                      <a:r>
+                        <a:t>FedHierLoader</a:t>
+                      </a:r>
+                    </a:p>
+                  </a:txBody>
+                  <a:tcPr/>
+                </a:tc>
+                <a:tc>
+                  <a:txBody>
+                    <a:bodyPr lIns="45720" rIns="45720" tIns="27432" bIns="27432"/>
+                    <a:lstStyle/>
+                    <a:p>
+                      <a:pPr>
+                        <a:defRPr sz="1200">
+                          <a:solidFill>
+                            <a:srgbClr val="000000"/>
+                          </a:solidFill>
+                        </a:defRPr>
+                      </a:pPr>
+                      <a:r>
+                        <a:t>Refresh single agency/office org</a:t>
+                      </a:r>
+                    </a:p>
+                  </a:txBody>
+                  <a:tcPr/>
+                </a:tc>
+              </a:tr>
+              <a:tr h="402336">
+                <a:tc>
+                  <a:txBody>
+                    <a:bodyPr lIns="45720" rIns="45720" tIns="27432" bIns="27432"/>
+                    <a:lstStyle/>
+                    <a:p>
+                      <a:pPr>
+                        <a:defRPr sz="1200">
+                          <a:solidFill>
+                            <a:srgbClr val="000000"/>
+                          </a:solidFill>
+                        </a:defRPr>
+                      </a:pPr>
+                      <a:r>
+                        <a:t>ATTACHMENT_ANALYSIS</a:t>
+                      </a:r>
+                    </a:p>
+                  </a:txBody>
+                  <a:tcPr>
+                    <a:solidFill>
+                      <a:srgbClr val="F2F2F2"/>
+                    </a:solidFill>
+                  </a:tcPr>
+                </a:tc>
+                <a:tc>
+                  <a:txBody>
+                    <a:bodyPr lIns="45720" rIns="45720" tIns="27432" bIns="27432"/>
+                    <a:lstStyle/>
+                    <a:p>
+                      <a:pPr>
+                        <a:defRPr sz="1200">
+                          <a:solidFill>
+                            <a:srgbClr val="000000"/>
+                          </a:solidFill>
+                        </a:defRPr>
+                      </a:pPr>
+                      <a:r>
+                        <a:t>Local processing</a:t>
+                      </a:r>
+                    </a:p>
+                  </a:txBody>
+                  <a:tcPr>
+                    <a:solidFill>
+                      <a:srgbClr val="F2F2F2"/>
+                    </a:solidFill>
+                  </a:tcPr>
+                </a:tc>
+                <a:tc>
+                  <a:txBody>
+                    <a:bodyPr lIns="45720" rIns="45720" tIns="27432" bIns="27432"/>
+                    <a:lstStyle/>
+                    <a:p>
+                      <a:pPr>
+                        <a:defRPr sz="1200">
+                          <a:solidFill>
+                            <a:srgbClr val="000000"/>
+                          </a:solidFill>
+                        </a:defRPr>
+                      </a:pPr>
+                      <a:r>
+                        <a:t>AttachmentPipeline</a:t>
+                      </a:r>
+                    </a:p>
+                  </a:txBody>
+                  <a:tcPr>
+                    <a:solidFill>
+                      <a:srgbClr val="F2F2F2"/>
+                    </a:solidFill>
+                  </a:tcPr>
+                </a:tc>
+                <a:tc>
+                  <a:txBody>
+                    <a:bodyPr lIns="45720" rIns="45720" tIns="27432" bIns="27432"/>
+                    <a:lstStyle/>
+                    <a:p>
+                      <a:pPr>
+                        <a:defRPr sz="1200">
+                          <a:solidFill>
+                            <a:srgbClr val="000000"/>
+                          </a:solidFill>
+                        </a:defRPr>
+                      </a:pPr>
+                      <a:r>
+                        <a:t>AI analysis of opp attachments</a:t>
+                      </a:r>
+                    </a:p>
+                  </a:txBody>
+                  <a:tcPr>
+                    <a:solidFill>
+                      <a:srgbClr val="F2F2F2"/>
+                    </a:solidFill>
+                  </a:tcPr>
+                </a:tc>
+              </a:tr>
             </a:tbl>
           </a:graphicData>
         </a:graphic>
@@ -6225,7 +6397,7 @@
               </a:defRPr>
             </a:pPr>
             <a:r>
-              <a:t>  SAM Awards client uses Key 2 (1000/day) for on-demand loads</a:t>
+              <a:t>  SAM APIs use Key 2 (1000/day); Fed Hierarchy refresh = 1 API call per org</a:t>
             </a:r>
           </a:p>
         </p:txBody>
@@ -7633,7 +7805,7 @@
         <p:spPr>
           <a:xfrm>
             <a:off x="274320" y="1280160"/>
-            <a:ext cx="548640" cy="548640"/>
+            <a:ext cx="548640" cy="502920"/>
           </a:xfrm>
           <a:prstGeom prst="roundRect">
             <a:avLst/>
@@ -7666,7 +7838,7 @@
           <a:lstStyle/>
           <a:p>
             <a:pPr algn="ctr">
-              <a:defRPr sz="1800" b="1">
+              <a:defRPr sz="1600" b="1">
                 <a:solidFill>
                   <a:srgbClr val="FFFFFF"/>
                 </a:solidFill>
@@ -7687,7 +7859,7 @@
         <p:spPr>
           <a:xfrm>
             <a:off x="914400" y="1280160"/>
-            <a:ext cx="1828800" cy="548640"/>
+            <a:ext cx="1828800" cy="502920"/>
           </a:xfrm>
           <a:prstGeom prst="roundRect">
             <a:avLst/>
@@ -7720,7 +7892,7 @@
           <a:lstStyle/>
           <a:p>
             <a:pPr algn="ctr">
-              <a:defRPr sz="1200" b="1">
+              <a:defRPr sz="1100" b="1">
                 <a:solidFill>
                   <a:srgbClr val="FFFFFF"/>
                 </a:solidFill>
@@ -7740,7 +7912,7 @@
         </p:nvSpPr>
         <p:spPr>
           <a:xfrm>
-            <a:off x="2834640" y="1371600"/>
+            <a:off x="2834640" y="1325880"/>
             <a:ext cx="2926080" cy="457200"/>
           </a:xfrm>
           <a:prstGeom prst="rect">
@@ -7755,7 +7927,7 @@
           <a:lstStyle/>
           <a:p>
             <a:pPr algn="l">
-              <a:defRPr sz="1100" b="0">
+              <a:defRPr sz="1000" b="0">
                 <a:solidFill>
                   <a:srgbClr val="000000"/>
                 </a:solidFill>
@@ -7775,8 +7947,8 @@
         </p:nvSpPr>
         <p:spPr>
           <a:xfrm>
-            <a:off x="274320" y="2286000"/>
-            <a:ext cx="548640" cy="548640"/>
+            <a:off x="274320" y="2148839"/>
+            <a:ext cx="548640" cy="502920"/>
           </a:xfrm>
           <a:prstGeom prst="roundRect">
             <a:avLst/>
@@ -7809,7 +7981,7 @@
           <a:lstStyle/>
           <a:p>
             <a:pPr algn="ctr">
-              <a:defRPr sz="1800" b="1">
+              <a:defRPr sz="1600" b="1">
                 <a:solidFill>
                   <a:srgbClr val="FFFFFF"/>
                 </a:solidFill>
@@ -7829,8 +8001,8 @@
         </p:nvSpPr>
         <p:spPr>
           <a:xfrm>
-            <a:off x="914400" y="2286000"/>
-            <a:ext cx="1828800" cy="548640"/>
+            <a:off x="914400" y="2148839"/>
+            <a:ext cx="1828800" cy="502920"/>
           </a:xfrm>
           <a:prstGeom prst="roundRect">
             <a:avLst/>
@@ -7863,14 +8035,14 @@
           <a:lstStyle/>
           <a:p>
             <a:pPr algn="ctr">
-              <a:defRPr sz="1200" b="1">
+              <a:defRPr sz="1100" b="1">
                 <a:solidFill>
                   <a:srgbClr val="FFFFFF"/>
                 </a:solidFill>
               </a:defRPr>
             </a:pPr>
             <a:r>
-              <a:t>Load USASpending Bulk</a:t>
+              <a:t>Fetch Descriptions</a:t>
             </a:r>
           </a:p>
         </p:txBody>
@@ -7883,7 +8055,7 @@
         </p:nvSpPr>
         <p:spPr>
           <a:xfrm>
-            <a:off x="2834640" y="2377440"/>
+            <a:off x="2834640" y="2194559"/>
             <a:ext cx="2926080" cy="457200"/>
           </a:xfrm>
           <a:prstGeom prst="rect">
@@ -7898,14 +8070,14 @@
           <a:lstStyle/>
           <a:p>
             <a:pPr algn="l">
-              <a:defRPr sz="1100" b="0">
+              <a:defRPr sz="1000" b="0">
                 <a:solidFill>
                   <a:srgbClr val="000000"/>
                 </a:solidFill>
               </a:defRPr>
             </a:pPr>
             <a:r>
-              <a:t>5 days back, award + transaction data</a:t>
+              <a:t>Priority NAICS+set-aside first, limit 100/day</a:t>
             </a:r>
           </a:p>
         </p:txBody>
@@ -7918,8 +8090,8 @@
         </p:nvSpPr>
         <p:spPr>
           <a:xfrm>
-            <a:off x="274320" y="3291840"/>
-            <a:ext cx="548640" cy="548640"/>
+            <a:off x="274320" y="3017520"/>
+            <a:ext cx="548640" cy="502920"/>
           </a:xfrm>
           <a:prstGeom prst="roundRect">
             <a:avLst/>
@@ -7952,7 +8124,7 @@
           <a:lstStyle/>
           <a:p>
             <a:pPr algn="ctr">
-              <a:defRPr sz="1800" b="1">
+              <a:defRPr sz="1600" b="1">
                 <a:solidFill>
                   <a:srgbClr val="FFFFFF"/>
                 </a:solidFill>
@@ -7972,8 +8144,8 @@
         </p:nvSpPr>
         <p:spPr>
           <a:xfrm>
-            <a:off x="914400" y="3291840"/>
-            <a:ext cx="1828800" cy="548640"/>
+            <a:off x="914400" y="3017520"/>
+            <a:ext cx="1828800" cy="502920"/>
           </a:xfrm>
           <a:prstGeom prst="roundRect">
             <a:avLst/>
@@ -8006,14 +8178,14 @@
           <a:lstStyle/>
           <a:p>
             <a:pPr algn="ctr">
-              <a:defRPr sz="1200" b="1">
+              <a:defRPr sz="1100" b="1">
                 <a:solidFill>
                   <a:srgbClr val="FFFFFF"/>
                 </a:solidFill>
               </a:defRPr>
             </a:pPr>
             <a:r>
-              <a:t>Load Awards - 8(a)</a:t>
+              <a:t>Load USASpending Bulk</a:t>
             </a:r>
           </a:p>
         </p:txBody>
@@ -8026,7 +8198,7 @@
         </p:nvSpPr>
         <p:spPr>
           <a:xfrm>
-            <a:off x="2834640" y="3383280"/>
+            <a:off x="2834640" y="3063240"/>
             <a:ext cx="2926080" cy="457200"/>
           </a:xfrm>
           <a:prstGeom prst="rect">
@@ -8041,14 +8213,14 @@
           <a:lstStyle/>
           <a:p>
             <a:pPr algn="l">
-              <a:defRPr sz="1100" b="0">
+              <a:defRPr sz="1000" b="0">
                 <a:solidFill>
                   <a:srgbClr val="000000"/>
                 </a:solidFill>
               </a:defRPr>
             </a:pPr>
             <a:r>
-              <a:t>10 days back, 24 NAICS codes, key 2</a:t>
+              <a:t>5 days back, award + transaction data</a:t>
             </a:r>
           </a:p>
         </p:txBody>
@@ -8061,8 +8233,8 @@
         </p:nvSpPr>
         <p:spPr>
           <a:xfrm>
-            <a:off x="274320" y="4297680"/>
-            <a:ext cx="548640" cy="548640"/>
+            <a:off x="274320" y="3886200"/>
+            <a:ext cx="548640" cy="502920"/>
           </a:xfrm>
           <a:prstGeom prst="roundRect">
             <a:avLst/>
@@ -8095,7 +8267,7 @@
           <a:lstStyle/>
           <a:p>
             <a:pPr algn="ctr">
-              <a:defRPr sz="1800" b="1">
+              <a:defRPr sz="1600" b="1">
                 <a:solidFill>
                   <a:srgbClr val="FFFFFF"/>
                 </a:solidFill>
@@ -8115,8 +8287,8 @@
         </p:nvSpPr>
         <p:spPr>
           <a:xfrm>
-            <a:off x="914400" y="4297680"/>
-            <a:ext cx="1828800" cy="548640"/>
+            <a:off x="914400" y="3886200"/>
+            <a:ext cx="1828800" cy="502920"/>
           </a:xfrm>
           <a:prstGeom prst="roundRect">
             <a:avLst/>
@@ -8149,14 +8321,14 @@
           <a:lstStyle/>
           <a:p>
             <a:pPr algn="ctr">
-              <a:defRPr sz="1200" b="1">
+              <a:defRPr sz="1100" b="1">
                 <a:solidFill>
                   <a:srgbClr val="FFFFFF"/>
                 </a:solidFill>
               </a:defRPr>
             </a:pPr>
             <a:r>
-              <a:t>Load Awards - WOSB</a:t>
+              <a:t>Load Awards - 8(a)</a:t>
             </a:r>
           </a:p>
         </p:txBody>
@@ -8169,7 +8341,7 @@
         </p:nvSpPr>
         <p:spPr>
           <a:xfrm>
-            <a:off x="2834640" y="4389120"/>
+            <a:off x="2834640" y="3931920"/>
             <a:ext cx="2926080" cy="457200"/>
           </a:xfrm>
           <a:prstGeom prst="rect">
@@ -8184,7 +8356,7 @@
           <a:lstStyle/>
           <a:p>
             <a:pPr algn="l">
-              <a:defRPr sz="1100" b="0">
+              <a:defRPr sz="1000" b="0">
                 <a:solidFill>
                   <a:srgbClr val="000000"/>
                 </a:solidFill>
@@ -8204,8 +8376,8 @@
         </p:nvSpPr>
         <p:spPr>
           <a:xfrm>
-            <a:off x="274320" y="5303520"/>
-            <a:ext cx="548640" cy="548640"/>
+            <a:off x="274320" y="4754879"/>
+            <a:ext cx="548640" cy="502920"/>
           </a:xfrm>
           <a:prstGeom prst="roundRect">
             <a:avLst/>
@@ -8238,7 +8410,7 @@
           <a:lstStyle/>
           <a:p>
             <a:pPr algn="ctr">
-              <a:defRPr sz="1800" b="1">
+              <a:defRPr sz="1600" b="1">
                 <a:solidFill>
                   <a:srgbClr val="FFFFFF"/>
                 </a:solidFill>
@@ -8258,8 +8430,8 @@
         </p:nvSpPr>
         <p:spPr>
           <a:xfrm>
-            <a:off x="914400" y="5303520"/>
-            <a:ext cx="1828800" cy="548640"/>
+            <a:off x="914400" y="4754879"/>
+            <a:ext cx="1828800" cy="502920"/>
           </a:xfrm>
           <a:prstGeom prst="roundRect">
             <a:avLst/>
@@ -8292,14 +8464,14 @@
           <a:lstStyle/>
           <a:p>
             <a:pPr algn="ctr">
-              <a:defRPr sz="1200" b="1">
+              <a:defRPr sz="1100" b="1">
                 <a:solidFill>
                   <a:srgbClr val="FFFFFF"/>
                 </a:solidFill>
               </a:defRPr>
             </a:pPr>
             <a:r>
-              <a:t>Load Awards - SBA</a:t>
+              <a:t>Load Awards - WOSB</a:t>
             </a:r>
           </a:p>
         </p:txBody>
@@ -8312,7 +8484,7 @@
         </p:nvSpPr>
         <p:spPr>
           <a:xfrm>
-            <a:off x="2834640" y="5394960"/>
+            <a:off x="2834640" y="4800599"/>
             <a:ext cx="2926080" cy="457200"/>
           </a:xfrm>
           <a:prstGeom prst="rect">
@@ -8327,7 +8499,7 @@
           <a:lstStyle/>
           <a:p>
             <a:pPr algn="l">
-              <a:defRPr sz="1100" b="0">
+              <a:defRPr sz="1000" b="0">
                 <a:solidFill>
                   <a:srgbClr val="000000"/>
                 </a:solidFill>
@@ -8347,8 +8519,8 @@
         </p:nvSpPr>
         <p:spPr>
           <a:xfrm>
-            <a:off x="6217920" y="1280160"/>
-            <a:ext cx="548640" cy="548640"/>
+            <a:off x="274320" y="5623560"/>
+            <a:ext cx="548640" cy="502920"/>
           </a:xfrm>
           <a:prstGeom prst="roundRect">
             <a:avLst/>
@@ -8381,7 +8553,7 @@
           <a:lstStyle/>
           <a:p>
             <a:pPr algn="ctr">
-              <a:defRPr sz="1800" b="1">
+              <a:defRPr sz="1600" b="1">
                 <a:solidFill>
                   <a:srgbClr val="FFFFFF"/>
                 </a:solidFill>
@@ -8401,8 +8573,8 @@
         </p:nvSpPr>
         <p:spPr>
           <a:xfrm>
-            <a:off x="6858000" y="1280160"/>
-            <a:ext cx="2103120" cy="548640"/>
+            <a:off x="914400" y="5623560"/>
+            <a:ext cx="1828800" cy="502920"/>
           </a:xfrm>
           <a:prstGeom prst="roundRect">
             <a:avLst/>
@@ -8435,14 +8607,14 @@
           <a:lstStyle/>
           <a:p>
             <a:pPr algn="ctr">
-              <a:defRPr sz="1200" b="1">
+              <a:defRPr sz="1100" b="1">
                 <a:solidFill>
                   <a:srgbClr val="FFFFFF"/>
                 </a:solidFill>
               </a:defRPr>
             </a:pPr>
             <a:r>
-              <a:t>Enrich Link Metadata</a:t>
+              <a:t>Load Awards - SBA</a:t>
             </a:r>
           </a:p>
         </p:txBody>
@@ -8455,7 +8627,7 @@
         </p:nvSpPr>
         <p:spPr>
           <a:xfrm>
-            <a:off x="9052560" y="1371600"/>
+            <a:off x="2834640" y="5669280"/>
             <a:ext cx="2926080" cy="457200"/>
           </a:xfrm>
           <a:prstGeom prst="rect">
@@ -8470,14 +8642,14 @@
           <a:lstStyle/>
           <a:p>
             <a:pPr algn="l">
-              <a:defRPr sz="1100" b="0">
+              <a:defRPr sz="1000" b="0">
                 <a:solidFill>
                   <a:srgbClr val="000000"/>
                 </a:solidFill>
               </a:defRPr>
             </a:pPr>
             <a:r>
-              <a:t>Filenames, content types for resource links</a:t>
+              <a:t>10 days back, 24 NAICS codes, key 2</a:t>
             </a:r>
           </a:p>
         </p:txBody>
@@ -8490,8 +8662,8 @@
         </p:nvSpPr>
         <p:spPr>
           <a:xfrm>
-            <a:off x="6217920" y="2286000"/>
-            <a:ext cx="548640" cy="548640"/>
+            <a:off x="6217920" y="1280160"/>
+            <a:ext cx="548640" cy="502920"/>
           </a:xfrm>
           <a:prstGeom prst="roundRect">
             <a:avLst/>
@@ -8524,7 +8696,7 @@
           <a:lstStyle/>
           <a:p>
             <a:pPr algn="ctr">
-              <a:defRPr sz="1800" b="1">
+              <a:defRPr sz="1600" b="1">
                 <a:solidFill>
                   <a:srgbClr val="FFFFFF"/>
                 </a:solidFill>
@@ -8544,8 +8716,8 @@
         </p:nvSpPr>
         <p:spPr>
           <a:xfrm>
-            <a:off x="6858000" y="2286000"/>
-            <a:ext cx="2103120" cy="548640"/>
+            <a:off x="6858000" y="1280160"/>
+            <a:ext cx="2103120" cy="502920"/>
           </a:xfrm>
           <a:prstGeom prst="roundRect">
             <a:avLst/>
@@ -8578,14 +8750,14 @@
           <a:lstStyle/>
           <a:p>
             <a:pPr algn="ctr">
-              <a:defRPr sz="1200" b="1">
+              <a:defRPr sz="1100" b="1">
                 <a:solidFill>
                   <a:srgbClr val="FFFFFF"/>
                 </a:solidFill>
               </a:defRPr>
             </a:pPr>
             <a:r>
-              <a:t>Download Attachments</a:t>
+              <a:t>Enrich Link Metadata</a:t>
             </a:r>
           </a:p>
         </p:txBody>
@@ -8598,7 +8770,7 @@
         </p:nvSpPr>
         <p:spPr>
           <a:xfrm>
-            <a:off x="9052560" y="2377440"/>
+            <a:off x="9052560" y="1325880"/>
             <a:ext cx="2926080" cy="457200"/>
           </a:xfrm>
           <a:prstGeom prst="rect">
@@ -8613,14 +8785,14 @@
           <a:lstStyle/>
           <a:p>
             <a:pPr algn="l">
-              <a:defRPr sz="1100" b="0">
+              <a:defRPr sz="1000" b="0">
                 <a:solidFill>
                   <a:srgbClr val="000000"/>
                 </a:solidFill>
               </a:defRPr>
             </a:pPr>
             <a:r>
-              <a:t>Active opps, missing only, batch 5000</a:t>
+              <a:t>Filenames, content types for resource links</a:t>
             </a:r>
           </a:p>
         </p:txBody>
@@ -8633,8 +8805,8 @@
         </p:nvSpPr>
         <p:spPr>
           <a:xfrm>
-            <a:off x="6217920" y="3291840"/>
-            <a:ext cx="548640" cy="548640"/>
+            <a:off x="6217920" y="2148839"/>
+            <a:ext cx="548640" cy="502920"/>
           </a:xfrm>
           <a:prstGeom prst="roundRect">
             <a:avLst/>
@@ -8667,7 +8839,7 @@
           <a:lstStyle/>
           <a:p>
             <a:pPr algn="ctr">
-              <a:defRPr sz="1800" b="1">
+              <a:defRPr sz="1600" b="1">
                 <a:solidFill>
                   <a:srgbClr val="FFFFFF"/>
                 </a:solidFill>
@@ -8687,8 +8859,8 @@
         </p:nvSpPr>
         <p:spPr>
           <a:xfrm>
-            <a:off x="6858000" y="3291840"/>
-            <a:ext cx="2103120" cy="548640"/>
+            <a:off x="6858000" y="2148839"/>
+            <a:ext cx="2103120" cy="502920"/>
           </a:xfrm>
           <a:prstGeom prst="roundRect">
             <a:avLst/>
@@ -8721,14 +8893,14 @@
           <a:lstStyle/>
           <a:p>
             <a:pPr algn="ctr">
-              <a:defRPr sz="1200" b="1">
+              <a:defRPr sz="1100" b="1">
                 <a:solidFill>
                   <a:srgbClr val="FFFFFF"/>
                 </a:solidFill>
               </a:defRPr>
             </a:pPr>
             <a:r>
-              <a:t>Extract Attachment Text</a:t>
+              <a:t>Download Attachments</a:t>
             </a:r>
           </a:p>
         </p:txBody>
@@ -8741,7 +8913,7 @@
         </p:nvSpPr>
         <p:spPr>
           <a:xfrm>
-            <a:off x="9052560" y="3383280"/>
+            <a:off x="9052560" y="2194559"/>
             <a:ext cx="2926080" cy="457200"/>
           </a:xfrm>
           <a:prstGeom prst="rect">
@@ -8756,14 +8928,14 @@
           <a:lstStyle/>
           <a:p>
             <a:pPr algn="l">
-              <a:defRPr sz="1100" b="0">
+              <a:defRPr sz="1000" b="0">
                 <a:solidFill>
                   <a:srgbClr val="000000"/>
                 </a:solidFill>
               </a:defRPr>
             </a:pPr>
             <a:r>
-              <a:t>PDF/DOCX/XLSX text extraction, batch 5000</a:t>
+              <a:t>Active opps, missing only, batch 5000</a:t>
             </a:r>
           </a:p>
         </p:txBody>
@@ -8776,8 +8948,8 @@
         </p:nvSpPr>
         <p:spPr>
           <a:xfrm>
-            <a:off x="6217920" y="4297680"/>
-            <a:ext cx="548640" cy="548640"/>
+            <a:off x="6217920" y="3017520"/>
+            <a:ext cx="548640" cy="502920"/>
           </a:xfrm>
           <a:prstGeom prst="roundRect">
             <a:avLst/>
@@ -8810,7 +8982,7 @@
           <a:lstStyle/>
           <a:p>
             <a:pPr algn="ctr">
-              <a:defRPr sz="1800" b="1">
+              <a:defRPr sz="1600" b="1">
                 <a:solidFill>
                   <a:srgbClr val="FFFFFF"/>
                 </a:solidFill>
@@ -8830,8 +9002,8 @@
         </p:nvSpPr>
         <p:spPr>
           <a:xfrm>
-            <a:off x="6858000" y="4297680"/>
-            <a:ext cx="2103120" cy="548640"/>
+            <a:off x="6858000" y="3017520"/>
+            <a:ext cx="2103120" cy="502920"/>
           </a:xfrm>
           <a:prstGeom prst="roundRect">
             <a:avLst/>
@@ -8864,14 +9036,14 @@
           <a:lstStyle/>
           <a:p>
             <a:pPr algn="ctr">
-              <a:defRPr sz="1200" b="1">
+              <a:defRPr sz="1100" b="1">
                 <a:solidFill>
                   <a:srgbClr val="FFFFFF"/>
                 </a:solidFill>
               </a:defRPr>
             </a:pPr>
             <a:r>
-              <a:t>Extract Attachment Intel</a:t>
+              <a:t>Extract Text</a:t>
             </a:r>
           </a:p>
         </p:txBody>
@@ -8884,7 +9056,7 @@
         </p:nvSpPr>
         <p:spPr>
           <a:xfrm>
-            <a:off x="9052560" y="4389120"/>
+            <a:off x="9052560" y="3063240"/>
             <a:ext cx="2926080" cy="457200"/>
           </a:xfrm>
           <a:prstGeom prst="rect">
@@ -8899,14 +9071,14 @@
           <a:lstStyle/>
           <a:p>
             <a:pPr algn="l">
-              <a:defRPr sz="1100" b="0">
+              <a:defRPr sz="1000" b="0">
                 <a:solidFill>
                   <a:srgbClr val="000000"/>
                 </a:solidFill>
               </a:defRPr>
             </a:pPr>
             <a:r>
-              <a:t>Keyword intelligence from text, batch 5000</a:t>
+              <a:t>PDF/DOCX/XLSX text extraction, batch 5000</a:t>
             </a:r>
           </a:p>
         </p:txBody>
@@ -8919,8 +9091,8 @@
         </p:nvSpPr>
         <p:spPr>
           <a:xfrm>
-            <a:off x="6217920" y="5303520"/>
-            <a:ext cx="548640" cy="548640"/>
+            <a:off x="6217920" y="3886200"/>
+            <a:ext cx="548640" cy="502920"/>
           </a:xfrm>
           <a:prstGeom prst="roundRect">
             <a:avLst/>
@@ -8953,7 +9125,7 @@
           <a:lstStyle/>
           <a:p>
             <a:pPr algn="ctr">
-              <a:defRPr sz="1800" b="1">
+              <a:defRPr sz="1600" b="1">
                 <a:solidFill>
                   <a:srgbClr val="FFFFFF"/>
                 </a:solidFill>
@@ -8973,8 +9145,8 @@
         </p:nvSpPr>
         <p:spPr>
           <a:xfrm>
-            <a:off x="6858000" y="5303520"/>
-            <a:ext cx="2103120" cy="548640"/>
+            <a:off x="6858000" y="3886200"/>
+            <a:ext cx="2103120" cy="502920"/>
           </a:xfrm>
           <a:prstGeom prst="roundRect">
             <a:avLst/>
@@ -9007,14 +9179,14 @@
           <a:lstStyle/>
           <a:p>
             <a:pPr algn="ctr">
-              <a:defRPr sz="1200" b="1">
+              <a:defRPr sz="1100" b="1">
                 <a:solidFill>
                   <a:srgbClr val="FFFFFF"/>
                 </a:solidFill>
               </a:defRPr>
             </a:pPr>
             <a:r>
-              <a:t>Cleanup Attachment Files</a:t>
+              <a:t>Extract Intel</a:t>
             </a:r>
           </a:p>
         </p:txBody>
@@ -9027,7 +9199,7 @@
         </p:nvSpPr>
         <p:spPr>
           <a:xfrm>
-            <a:off x="9052560" y="5394960"/>
+            <a:off x="9052560" y="3931920"/>
             <a:ext cx="2926080" cy="457200"/>
           </a:xfrm>
           <a:prstGeom prst="rect">
@@ -9042,13 +9214,299 @@
           <a:lstStyle/>
           <a:p>
             <a:pPr algn="l">
-              <a:defRPr sz="1100" b="0">
+              <a:defRPr sz="1000" b="0">
                 <a:solidFill>
                   <a:srgbClr val="000000"/>
                 </a:solidFill>
               </a:defRPr>
             </a:pPr>
             <a:r>
+              <a:t>Keyword intelligence from text, batch 5000</a:t>
+            </a:r>
+          </a:p>
+        </p:txBody>
+      </p:sp>
+      <p:sp>
+        <p:nvSpPr>
+          <p:cNvPr id="33" name="Rounded Rectangle 32"/>
+          <p:cNvSpPr/>
+          <p:nvPr/>
+        </p:nvSpPr>
+        <p:spPr>
+          <a:xfrm>
+            <a:off x="6217920" y="4754879"/>
+            <a:ext cx="548640" cy="502920"/>
+          </a:xfrm>
+          <a:prstGeom prst="roundRect">
+            <a:avLst/>
+          </a:prstGeom>
+          <a:solidFill>
+            <a:srgbClr val="1B3A5C"/>
+          </a:solidFill>
+          <a:ln w="12700">
+            <a:solidFill>
+              <a:srgbClr val="999999"/>
+            </a:solidFill>
+          </a:ln>
+        </p:spPr>
+        <p:style>
+          <a:lnRef idx="1">
+            <a:schemeClr val="accent1"/>
+          </a:lnRef>
+          <a:fillRef idx="3">
+            <a:schemeClr val="accent1"/>
+          </a:fillRef>
+          <a:effectRef idx="2">
+            <a:schemeClr val="accent1"/>
+          </a:effectRef>
+          <a:fontRef idx="minor">
+            <a:schemeClr val="lt1"/>
+          </a:fontRef>
+        </p:style>
+        <p:txBody>
+          <a:bodyPr rtlCol="0" anchor="ctr" wrap="square" lIns="45720" rIns="45720"/>
+          <a:lstStyle/>
+          <a:p>
+            <a:pPr algn="ctr">
+              <a:defRPr sz="1600" b="1">
+                <a:solidFill>
+                  <a:srgbClr val="FFFFFF"/>
+                </a:solidFill>
+              </a:defRPr>
+            </a:pPr>
+            <a:r>
+              <a:t>11</a:t>
+            </a:r>
+          </a:p>
+        </p:txBody>
+      </p:sp>
+      <p:sp>
+        <p:nvSpPr>
+          <p:cNvPr id="34" name="Rounded Rectangle 33"/>
+          <p:cNvSpPr/>
+          <p:nvPr/>
+        </p:nvSpPr>
+        <p:spPr>
+          <a:xfrm>
+            <a:off x="6858000" y="4754879"/>
+            <a:ext cx="2103120" cy="502920"/>
+          </a:xfrm>
+          <a:prstGeom prst="roundRect">
+            <a:avLst/>
+          </a:prstGeom>
+          <a:solidFill>
+            <a:srgbClr val="2E75B6"/>
+          </a:solidFill>
+          <a:ln w="12700">
+            <a:solidFill>
+              <a:srgbClr val="999999"/>
+            </a:solidFill>
+          </a:ln>
+        </p:spPr>
+        <p:style>
+          <a:lnRef idx="1">
+            <a:schemeClr val="accent1"/>
+          </a:lnRef>
+          <a:fillRef idx="3">
+            <a:schemeClr val="accent1"/>
+          </a:fillRef>
+          <a:effectRef idx="2">
+            <a:schemeClr val="accent1"/>
+          </a:effectRef>
+          <a:fontRef idx="minor">
+            <a:schemeClr val="lt1"/>
+          </a:fontRef>
+        </p:style>
+        <p:txBody>
+          <a:bodyPr rtlCol="0" anchor="ctr" wrap="square" lIns="45720" rIns="45720"/>
+          <a:lstStyle/>
+          <a:p>
+            <a:pPr algn="ctr">
+              <a:defRPr sz="1100" b="1">
+                <a:solidFill>
+                  <a:srgbClr val="FFFFFF"/>
+                </a:solidFill>
+              </a:defRPr>
+            </a:pPr>
+            <a:r>
+              <a:t>Backfill Opp Intel</a:t>
+            </a:r>
+          </a:p>
+        </p:txBody>
+      </p:sp>
+      <p:sp>
+        <p:nvSpPr>
+          <p:cNvPr id="35" name="TextBox 34"/>
+          <p:cNvSpPr txBox="1"/>
+          <p:nvPr/>
+        </p:nvSpPr>
+        <p:spPr>
+          <a:xfrm>
+            <a:off x="9052560" y="4800599"/>
+            <a:ext cx="2926080" cy="457200"/>
+          </a:xfrm>
+          <a:prstGeom prst="rect">
+            <a:avLst/>
+          </a:prstGeom>
+          <a:noFill/>
+        </p:spPr>
+        <p:txBody>
+          <a:bodyPr wrap="square">
+            <a:spAutoFit/>
+          </a:bodyPr>
+          <a:lstStyle/>
+          <a:p>
+            <a:pPr algn="l">
+              <a:defRPr sz="1000" b="0">
+                <a:solidFill>
+                  <a:srgbClr val="000000"/>
+                </a:solidFill>
+              </a:defRPr>
+            </a:pPr>
+            <a:r>
+              <a:t>Propagate intel findings to opportunity table</a:t>
+            </a:r>
+          </a:p>
+        </p:txBody>
+      </p:sp>
+      <p:sp>
+        <p:nvSpPr>
+          <p:cNvPr id="36" name="Rounded Rectangle 35"/>
+          <p:cNvSpPr/>
+          <p:nvPr/>
+        </p:nvSpPr>
+        <p:spPr>
+          <a:xfrm>
+            <a:off x="6217920" y="5623560"/>
+            <a:ext cx="548640" cy="502920"/>
+          </a:xfrm>
+          <a:prstGeom prst="roundRect">
+            <a:avLst/>
+          </a:prstGeom>
+          <a:solidFill>
+            <a:srgbClr val="1B3A5C"/>
+          </a:solidFill>
+          <a:ln w="12700">
+            <a:solidFill>
+              <a:srgbClr val="999999"/>
+            </a:solidFill>
+          </a:ln>
+        </p:spPr>
+        <p:style>
+          <a:lnRef idx="1">
+            <a:schemeClr val="accent1"/>
+          </a:lnRef>
+          <a:fillRef idx="3">
+            <a:schemeClr val="accent1"/>
+          </a:fillRef>
+          <a:effectRef idx="2">
+            <a:schemeClr val="accent1"/>
+          </a:effectRef>
+          <a:fontRef idx="minor">
+            <a:schemeClr val="lt1"/>
+          </a:fontRef>
+        </p:style>
+        <p:txBody>
+          <a:bodyPr rtlCol="0" anchor="ctr" wrap="square" lIns="45720" rIns="45720"/>
+          <a:lstStyle/>
+          <a:p>
+            <a:pPr algn="ctr">
+              <a:defRPr sz="1600" b="1">
+                <a:solidFill>
+                  <a:srgbClr val="FFFFFF"/>
+                </a:solidFill>
+              </a:defRPr>
+            </a:pPr>
+            <a:r>
+              <a:t>12</a:t>
+            </a:r>
+          </a:p>
+        </p:txBody>
+      </p:sp>
+      <p:sp>
+        <p:nvSpPr>
+          <p:cNvPr id="37" name="Rounded Rectangle 36"/>
+          <p:cNvSpPr/>
+          <p:nvPr/>
+        </p:nvSpPr>
+        <p:spPr>
+          <a:xfrm>
+            <a:off x="6858000" y="5623560"/>
+            <a:ext cx="2103120" cy="502920"/>
+          </a:xfrm>
+          <a:prstGeom prst="roundRect">
+            <a:avLst/>
+          </a:prstGeom>
+          <a:solidFill>
+            <a:srgbClr val="2E75B6"/>
+          </a:solidFill>
+          <a:ln w="12700">
+            <a:solidFill>
+              <a:srgbClr val="999999"/>
+            </a:solidFill>
+          </a:ln>
+        </p:spPr>
+        <p:style>
+          <a:lnRef idx="1">
+            <a:schemeClr val="accent1"/>
+          </a:lnRef>
+          <a:fillRef idx="3">
+            <a:schemeClr val="accent1"/>
+          </a:fillRef>
+          <a:effectRef idx="2">
+            <a:schemeClr val="accent1"/>
+          </a:effectRef>
+          <a:fontRef idx="minor">
+            <a:schemeClr val="lt1"/>
+          </a:fontRef>
+        </p:style>
+        <p:txBody>
+          <a:bodyPr rtlCol="0" anchor="ctr" wrap="square" lIns="45720" rIns="45720"/>
+          <a:lstStyle/>
+          <a:p>
+            <a:pPr algn="ctr">
+              <a:defRPr sz="1100" b="1">
+                <a:solidFill>
+                  <a:srgbClr val="FFFFFF"/>
+                </a:solidFill>
+              </a:defRPr>
+            </a:pPr>
+            <a:r>
+              <a:t>Cleanup Files</a:t>
+            </a:r>
+          </a:p>
+        </p:txBody>
+      </p:sp>
+      <p:sp>
+        <p:nvSpPr>
+          <p:cNvPr id="38" name="TextBox 37"/>
+          <p:cNvSpPr txBox="1"/>
+          <p:nvPr/>
+        </p:nvSpPr>
+        <p:spPr>
+          <a:xfrm>
+            <a:off x="9052560" y="5669280"/>
+            <a:ext cx="2926080" cy="457200"/>
+          </a:xfrm>
+          <a:prstGeom prst="rect">
+            <a:avLst/>
+          </a:prstGeom>
+          <a:noFill/>
+        </p:spPr>
+        <p:txBody>
+          <a:bodyPr wrap="square">
+            <a:spAutoFit/>
+          </a:bodyPr>
+          <a:lstStyle/>
+          <a:p>
+            <a:pPr algn="l">
+              <a:defRPr sz="1000" b="0">
+                <a:solidFill>
+                  <a:srgbClr val="000000"/>
+                </a:solidFill>
+              </a:defRPr>
+            </a:pPr>
+            <a:r>
               <a:t>Delete files after all stages complete</a:t>
             </a:r>
           </a:p>
@@ -9056,7 +9514,7 @@
       </p:sp>
       <p:sp>
         <p:nvSpPr>
-          <p:cNvPr id="33" name="TextBox 32"/>
+          <p:cNvPr id="39" name="TextBox 38"/>
           <p:cNvSpPr txBox="1"/>
           <p:nvPr/>
         </p:nvSpPr>
